--- a/tests/golden/visual/composition/v2_evidence_board/deck.pptx
+++ b/tests/golden/visual/composition/v2_evidence_board/deck.pptx
@@ -910,7 +910,7 @@
         <p:spPr>
           <a:xfrm>
             <a:off x="640080" y="411480"/>
-            <a:ext cx="7863840" cy="457200"/>
+            <a:ext cx="7863840" cy="601218"/>
           </a:xfrm>
           <a:prstGeom prst="rect">
             <a:avLst/>
@@ -948,7 +948,7 @@
         </p:nvSpPr>
         <p:spPr>
           <a:xfrm>
-            <a:off x="640080" y="906780"/>
+            <a:off x="640080" y="1050798"/>
             <a:ext cx="7863840" cy="411480"/>
           </a:xfrm>
           <a:prstGeom prst="rect">
@@ -987,8 +987,8 @@
         </p:nvSpPr>
         <p:spPr>
           <a:xfrm>
-            <a:off x="640080" y="1394460"/>
-            <a:ext cx="3874770" cy="1072820"/>
+            <a:off x="640080" y="1538478"/>
+            <a:ext cx="3874770" cy="1016653"/>
           </a:xfrm>
           <a:prstGeom prst="rect">
             <a:avLst/>
@@ -996,11 +996,11 @@
           <a:solidFill>
             <a:srgbClr val="FFFFFF"/>
           </a:solidFill>
-          <a:ln w="12700">
+          <a:ln w="19050">
             <a:solidFill>
-              <a:srgbClr val="8B4513"/>
+              <a:srgbClr val="C47B2B"/>
             </a:solidFill>
-            <a:prstDash val="solid"/>
+            <a:prstDash val="dash"/>
           </a:ln>
         </p:spPr>
       </p:sp>
@@ -1012,7 +1012,7 @@
         </p:nvSpPr>
         <p:spPr>
           <a:xfrm>
-            <a:off x="777240" y="1747990"/>
+            <a:off x="777240" y="1863924"/>
             <a:ext cx="3600450" cy="365760"/>
           </a:xfrm>
           <a:prstGeom prst="rect">
@@ -1037,7 +1037,7 @@
                 <a:ea typeface="Microsoft YaHei" pitchFamily="34" charset="-122"/>
                 <a:cs typeface="Microsoft YaHei" pitchFamily="34" charset="-120"/>
               </a:rPr>
-              <a:t>图片占位</a:t>
+              <a:t>素材缺失/路径未解析</a:t>
             </a:r>
             <a:endParaRPr lang="en-US" sz="1200" dirty="0"/>
           </a:p>
@@ -1051,8 +1051,8 @@
         </p:nvSpPr>
         <p:spPr>
           <a:xfrm>
-            <a:off x="640080" y="2505380"/>
-            <a:ext cx="3874770" cy="302590"/>
+            <a:off x="640080" y="2593231"/>
+            <a:ext cx="3874770" cy="286748"/>
           </a:xfrm>
           <a:prstGeom prst="rect">
             <a:avLst/>
@@ -1090,8 +1090,8 @@
         </p:nvSpPr>
         <p:spPr>
           <a:xfrm>
-            <a:off x="4629150" y="1394460"/>
-            <a:ext cx="3874770" cy="1072820"/>
+            <a:off x="4629150" y="1538478"/>
+            <a:ext cx="3874770" cy="1016653"/>
           </a:xfrm>
           <a:prstGeom prst="rect">
             <a:avLst/>
@@ -1099,11 +1099,11 @@
           <a:solidFill>
             <a:srgbClr val="FFFFFF"/>
           </a:solidFill>
-          <a:ln w="12700">
+          <a:ln w="19050">
             <a:solidFill>
-              <a:srgbClr val="8B4513"/>
+              <a:srgbClr val="C47B2B"/>
             </a:solidFill>
-            <a:prstDash val="solid"/>
+            <a:prstDash val="dash"/>
           </a:ln>
         </p:spPr>
       </p:sp>
@@ -1115,7 +1115,7 @@
         </p:nvSpPr>
         <p:spPr>
           <a:xfrm>
-            <a:off x="4766310" y="1747990"/>
+            <a:off x="4766310" y="1863924"/>
             <a:ext cx="3600450" cy="365760"/>
           </a:xfrm>
           <a:prstGeom prst="rect">
@@ -1140,7 +1140,7 @@
                 <a:ea typeface="Microsoft YaHei" pitchFamily="34" charset="-122"/>
                 <a:cs typeface="Microsoft YaHei" pitchFamily="34" charset="-120"/>
               </a:rPr>
-              <a:t>图片占位</a:t>
+              <a:t>素材缺失/路径未解析</a:t>
             </a:r>
             <a:endParaRPr lang="en-US" sz="1200" dirty="0"/>
           </a:p>
@@ -1154,8 +1154,8 @@
         </p:nvSpPr>
         <p:spPr>
           <a:xfrm>
-            <a:off x="4629150" y="2505380"/>
-            <a:ext cx="3874770" cy="302590"/>
+            <a:off x="4629150" y="2593231"/>
+            <a:ext cx="3874770" cy="286748"/>
           </a:xfrm>
           <a:prstGeom prst="rect">
             <a:avLst/>
@@ -1193,8 +1193,8 @@
         </p:nvSpPr>
         <p:spPr>
           <a:xfrm>
-            <a:off x="640080" y="2922270"/>
-            <a:ext cx="3874770" cy="1072820"/>
+            <a:off x="640080" y="2994279"/>
+            <a:ext cx="3874770" cy="1016653"/>
           </a:xfrm>
           <a:prstGeom prst="rect">
             <a:avLst/>
@@ -1202,11 +1202,11 @@
           <a:solidFill>
             <a:srgbClr val="FFFFFF"/>
           </a:solidFill>
-          <a:ln w="12700">
+          <a:ln w="19050">
             <a:solidFill>
-              <a:srgbClr val="8B4513"/>
+              <a:srgbClr val="C47B2B"/>
             </a:solidFill>
-            <a:prstDash val="solid"/>
+            <a:prstDash val="dash"/>
           </a:ln>
         </p:spPr>
       </p:sp>
@@ -1218,7 +1218,7 @@
         </p:nvSpPr>
         <p:spPr>
           <a:xfrm>
-            <a:off x="777240" y="3275800"/>
+            <a:off x="777240" y="3319725"/>
             <a:ext cx="3600450" cy="365760"/>
           </a:xfrm>
           <a:prstGeom prst="rect">
@@ -1243,7 +1243,7 @@
                 <a:ea typeface="Microsoft YaHei" pitchFamily="34" charset="-122"/>
                 <a:cs typeface="Microsoft YaHei" pitchFamily="34" charset="-120"/>
               </a:rPr>
-              <a:t>图片占位</a:t>
+              <a:t>素材缺失/路径未解析</a:t>
             </a:r>
             <a:endParaRPr lang="en-US" sz="1200" dirty="0"/>
           </a:p>
@@ -1257,8 +1257,8 @@
         </p:nvSpPr>
         <p:spPr>
           <a:xfrm>
-            <a:off x="640080" y="4033190"/>
-            <a:ext cx="3874770" cy="302590"/>
+            <a:off x="640080" y="4049032"/>
+            <a:ext cx="3874770" cy="286748"/>
           </a:xfrm>
           <a:prstGeom prst="rect">
             <a:avLst/>
@@ -1296,8 +1296,8 @@
         </p:nvSpPr>
         <p:spPr>
           <a:xfrm>
-            <a:off x="4629150" y="2922270"/>
-            <a:ext cx="3874770" cy="1072820"/>
+            <a:off x="4629150" y="2994279"/>
+            <a:ext cx="3874770" cy="1016653"/>
           </a:xfrm>
           <a:prstGeom prst="rect">
             <a:avLst/>
@@ -1305,11 +1305,11 @@
           <a:solidFill>
             <a:srgbClr val="FFFFFF"/>
           </a:solidFill>
-          <a:ln w="12700">
+          <a:ln w="19050">
             <a:solidFill>
-              <a:srgbClr val="8B4513"/>
+              <a:srgbClr val="C47B2B"/>
             </a:solidFill>
-            <a:prstDash val="solid"/>
+            <a:prstDash val="dash"/>
           </a:ln>
         </p:spPr>
       </p:sp>
@@ -1321,7 +1321,7 @@
         </p:nvSpPr>
         <p:spPr>
           <a:xfrm>
-            <a:off x="4766310" y="3275800"/>
+            <a:off x="4766310" y="3319725"/>
             <a:ext cx="3600450" cy="365760"/>
           </a:xfrm>
           <a:prstGeom prst="rect">
@@ -1346,7 +1346,7 @@
                 <a:ea typeface="Microsoft YaHei" pitchFamily="34" charset="-122"/>
                 <a:cs typeface="Microsoft YaHei" pitchFamily="34" charset="-120"/>
               </a:rPr>
-              <a:t>图片占位</a:t>
+              <a:t>素材缺失/路径未解析</a:t>
             </a:r>
             <a:endParaRPr lang="en-US" sz="1200" dirty="0"/>
           </a:p>
@@ -1360,8 +1360,8 @@
         </p:nvSpPr>
         <p:spPr>
           <a:xfrm>
-            <a:off x="4629150" y="4033190"/>
-            <a:ext cx="3874770" cy="302590"/>
+            <a:off x="4629150" y="4049032"/>
+            <a:ext cx="3874770" cy="286748"/>
           </a:xfrm>
           <a:prstGeom prst="rect">
             <a:avLst/>

--- a/tests/golden/visual/composition/v2_evidence_board/deck.pptx
+++ b/tests/golden/visual/composition/v2_evidence_board/deck.pptx
@@ -910,7 +910,7 @@
         <p:spPr>
           <a:xfrm>
             <a:off x="640080" y="411480"/>
-            <a:ext cx="7863840" cy="601218"/>
+            <a:ext cx="7863840" cy="621792"/>
           </a:xfrm>
           <a:prstGeom prst="rect">
             <a:avLst/>
@@ -948,7 +948,7 @@
         </p:nvSpPr>
         <p:spPr>
           <a:xfrm>
-            <a:off x="640080" y="1050798"/>
+            <a:off x="640080" y="1071372"/>
             <a:ext cx="7863840" cy="411480"/>
           </a:xfrm>
           <a:prstGeom prst="rect">
@@ -987,8 +987,8 @@
         </p:nvSpPr>
         <p:spPr>
           <a:xfrm>
-            <a:off x="640080" y="1538478"/>
-            <a:ext cx="3874770" cy="1016653"/>
+            <a:off x="640080" y="1559052"/>
+            <a:ext cx="3874770" cy="1008629"/>
           </a:xfrm>
           <a:prstGeom prst="rect">
             <a:avLst/>
@@ -1012,7 +1012,7 @@
         </p:nvSpPr>
         <p:spPr>
           <a:xfrm>
-            <a:off x="777240" y="1863924"/>
+            <a:off x="777240" y="1880486"/>
             <a:ext cx="3600450" cy="365760"/>
           </a:xfrm>
           <a:prstGeom prst="rect">
@@ -1051,8 +1051,8 @@
         </p:nvSpPr>
         <p:spPr>
           <a:xfrm>
-            <a:off x="640080" y="2593231"/>
-            <a:ext cx="3874770" cy="286748"/>
+            <a:off x="640080" y="2605781"/>
+            <a:ext cx="3874770" cy="284485"/>
           </a:xfrm>
           <a:prstGeom prst="rect">
             <a:avLst/>
@@ -1090,8 +1090,8 @@
         </p:nvSpPr>
         <p:spPr>
           <a:xfrm>
-            <a:off x="4629150" y="1538478"/>
-            <a:ext cx="3874770" cy="1016653"/>
+            <a:off x="4629150" y="1559052"/>
+            <a:ext cx="3874770" cy="1008629"/>
           </a:xfrm>
           <a:prstGeom prst="rect">
             <a:avLst/>
@@ -1115,7 +1115,7 @@
         </p:nvSpPr>
         <p:spPr>
           <a:xfrm>
-            <a:off x="4766310" y="1863924"/>
+            <a:off x="4766310" y="1880486"/>
             <a:ext cx="3600450" cy="365760"/>
           </a:xfrm>
           <a:prstGeom prst="rect">
@@ -1154,8 +1154,8 @@
         </p:nvSpPr>
         <p:spPr>
           <a:xfrm>
-            <a:off x="4629150" y="2593231"/>
-            <a:ext cx="3874770" cy="286748"/>
+            <a:off x="4629150" y="2605781"/>
+            <a:ext cx="3874770" cy="284485"/>
           </a:xfrm>
           <a:prstGeom prst="rect">
             <a:avLst/>
@@ -1193,8 +1193,8 @@
         </p:nvSpPr>
         <p:spPr>
           <a:xfrm>
-            <a:off x="640080" y="2994279"/>
-            <a:ext cx="3874770" cy="1016653"/>
+            <a:off x="640080" y="3004566"/>
+            <a:ext cx="3874770" cy="1008629"/>
           </a:xfrm>
           <a:prstGeom prst="rect">
             <a:avLst/>
@@ -1218,7 +1218,7 @@
         </p:nvSpPr>
         <p:spPr>
           <a:xfrm>
-            <a:off x="777240" y="3319725"/>
+            <a:off x="777240" y="3326000"/>
             <a:ext cx="3600450" cy="365760"/>
           </a:xfrm>
           <a:prstGeom prst="rect">
@@ -1257,8 +1257,8 @@
         </p:nvSpPr>
         <p:spPr>
           <a:xfrm>
-            <a:off x="640080" y="4049032"/>
-            <a:ext cx="3874770" cy="286748"/>
+            <a:off x="640080" y="4051295"/>
+            <a:ext cx="3874770" cy="284485"/>
           </a:xfrm>
           <a:prstGeom prst="rect">
             <a:avLst/>
@@ -1296,8 +1296,8 @@
         </p:nvSpPr>
         <p:spPr>
           <a:xfrm>
-            <a:off x="4629150" y="2994279"/>
-            <a:ext cx="3874770" cy="1016653"/>
+            <a:off x="4629150" y="3004566"/>
+            <a:ext cx="3874770" cy="1008629"/>
           </a:xfrm>
           <a:prstGeom prst="rect">
             <a:avLst/>
@@ -1321,7 +1321,7 @@
         </p:nvSpPr>
         <p:spPr>
           <a:xfrm>
-            <a:off x="4766310" y="3319725"/>
+            <a:off x="4766310" y="3326000"/>
             <a:ext cx="3600450" cy="365760"/>
           </a:xfrm>
           <a:prstGeom prst="rect">
@@ -1360,8 +1360,8 @@
         </p:nvSpPr>
         <p:spPr>
           <a:xfrm>
-            <a:off x="4629150" y="4049032"/>
-            <a:ext cx="3874770" cy="286748"/>
+            <a:off x="4629150" y="4051295"/>
+            <a:ext cx="3874770" cy="284485"/>
           </a:xfrm>
           <a:prstGeom prst="rect">
             <a:avLst/>

--- a/tests/golden/visual/composition/v2_evidence_board/deck.pptx
+++ b/tests/golden/visual/composition/v2_evidence_board/deck.pptx
@@ -910,7 +910,7 @@
         <p:spPr>
           <a:xfrm>
             <a:off x="640080" y="411480"/>
-            <a:ext cx="7863840" cy="621792"/>
+            <a:ext cx="7863840" cy="601218"/>
           </a:xfrm>
           <a:prstGeom prst="rect">
             <a:avLst/>
@@ -948,7 +948,7 @@
         </p:nvSpPr>
         <p:spPr>
           <a:xfrm>
-            <a:off x="640080" y="1071372"/>
+            <a:off x="640080" y="1050798"/>
             <a:ext cx="7863840" cy="411480"/>
           </a:xfrm>
           <a:prstGeom prst="rect">
@@ -987,8 +987,8 @@
         </p:nvSpPr>
         <p:spPr>
           <a:xfrm>
-            <a:off x="640080" y="1559052"/>
-            <a:ext cx="3874770" cy="1008629"/>
+            <a:off x="640080" y="1538478"/>
+            <a:ext cx="3874770" cy="1016653"/>
           </a:xfrm>
           <a:prstGeom prst="rect">
             <a:avLst/>
@@ -1012,7 +1012,7 @@
         </p:nvSpPr>
         <p:spPr>
           <a:xfrm>
-            <a:off x="777240" y="1880486"/>
+            <a:off x="777240" y="1863924"/>
             <a:ext cx="3600450" cy="365760"/>
           </a:xfrm>
           <a:prstGeom prst="rect">
@@ -1051,8 +1051,8 @@
         </p:nvSpPr>
         <p:spPr>
           <a:xfrm>
-            <a:off x="640080" y="2605781"/>
-            <a:ext cx="3874770" cy="284485"/>
+            <a:off x="640080" y="2593231"/>
+            <a:ext cx="3874770" cy="286748"/>
           </a:xfrm>
           <a:prstGeom prst="rect">
             <a:avLst/>
@@ -1090,8 +1090,8 @@
         </p:nvSpPr>
         <p:spPr>
           <a:xfrm>
-            <a:off x="4629150" y="1559052"/>
-            <a:ext cx="3874770" cy="1008629"/>
+            <a:off x="4629150" y="1538478"/>
+            <a:ext cx="3874770" cy="1016653"/>
           </a:xfrm>
           <a:prstGeom prst="rect">
             <a:avLst/>
@@ -1115,7 +1115,7 @@
         </p:nvSpPr>
         <p:spPr>
           <a:xfrm>
-            <a:off x="4766310" y="1880486"/>
+            <a:off x="4766310" y="1863924"/>
             <a:ext cx="3600450" cy="365760"/>
           </a:xfrm>
           <a:prstGeom prst="rect">
@@ -1154,8 +1154,8 @@
         </p:nvSpPr>
         <p:spPr>
           <a:xfrm>
-            <a:off x="4629150" y="2605781"/>
-            <a:ext cx="3874770" cy="284485"/>
+            <a:off x="4629150" y="2593231"/>
+            <a:ext cx="3874770" cy="286748"/>
           </a:xfrm>
           <a:prstGeom prst="rect">
             <a:avLst/>
@@ -1193,8 +1193,8 @@
         </p:nvSpPr>
         <p:spPr>
           <a:xfrm>
-            <a:off x="640080" y="3004566"/>
-            <a:ext cx="3874770" cy="1008629"/>
+            <a:off x="640080" y="2994279"/>
+            <a:ext cx="3874770" cy="1016653"/>
           </a:xfrm>
           <a:prstGeom prst="rect">
             <a:avLst/>
@@ -1218,7 +1218,7 @@
         </p:nvSpPr>
         <p:spPr>
           <a:xfrm>
-            <a:off x="777240" y="3326000"/>
+            <a:off x="777240" y="3319725"/>
             <a:ext cx="3600450" cy="365760"/>
           </a:xfrm>
           <a:prstGeom prst="rect">
@@ -1257,8 +1257,8 @@
         </p:nvSpPr>
         <p:spPr>
           <a:xfrm>
-            <a:off x="640080" y="4051295"/>
-            <a:ext cx="3874770" cy="284485"/>
+            <a:off x="640080" y="4049032"/>
+            <a:ext cx="3874770" cy="286748"/>
           </a:xfrm>
           <a:prstGeom prst="rect">
             <a:avLst/>
@@ -1296,8 +1296,8 @@
         </p:nvSpPr>
         <p:spPr>
           <a:xfrm>
-            <a:off x="4629150" y="3004566"/>
-            <a:ext cx="3874770" cy="1008629"/>
+            <a:off x="4629150" y="2994279"/>
+            <a:ext cx="3874770" cy="1016653"/>
           </a:xfrm>
           <a:prstGeom prst="rect">
             <a:avLst/>
@@ -1321,7 +1321,7 @@
         </p:nvSpPr>
         <p:spPr>
           <a:xfrm>
-            <a:off x="4766310" y="3326000"/>
+            <a:off x="4766310" y="3319725"/>
             <a:ext cx="3600450" cy="365760"/>
           </a:xfrm>
           <a:prstGeom prst="rect">
@@ -1360,8 +1360,8 @@
         </p:nvSpPr>
         <p:spPr>
           <a:xfrm>
-            <a:off x="4629150" y="4051295"/>
-            <a:ext cx="3874770" cy="284485"/>
+            <a:off x="4629150" y="4049032"/>
+            <a:ext cx="3874770" cy="286748"/>
           </a:xfrm>
           <a:prstGeom prst="rect">
             <a:avLst/>

--- a/tests/golden/visual/composition/v2_evidence_board/deck.pptx
+++ b/tests/golden/visual/composition/v2_evidence_board/deck.pptx
@@ -910,7 +910,7 @@
         <p:spPr>
           <a:xfrm>
             <a:off x="640080" y="411480"/>
-            <a:ext cx="7863840" cy="601218"/>
+            <a:ext cx="7863840" cy="400050"/>
           </a:xfrm>
           <a:prstGeom prst="rect">
             <a:avLst/>
@@ -942,14 +942,323 @@
       </p:sp>
       <p:sp>
         <p:nvSpPr>
-          <p:cNvPr id="3" name="Text 1"/>
+          <p:cNvPr id="3" name="Shape 1"/>
           <p:cNvSpPr/>
           <p:nvPr/>
         </p:nvSpPr>
         <p:spPr>
           <a:xfrm>
-            <a:off x="640080" y="1050798"/>
-            <a:ext cx="7863840" cy="411480"/>
+            <a:off x="640080" y="887730"/>
+            <a:ext cx="4804715" cy="2648712"/>
+          </a:xfrm>
+          <a:prstGeom prst="rect">
+            <a:avLst/>
+          </a:prstGeom>
+          <a:solidFill>
+            <a:srgbClr val="FFFFFF"/>
+          </a:solidFill>
+          <a:ln w="19050">
+            <a:solidFill>
+              <a:srgbClr val="C47B2B"/>
+            </a:solidFill>
+            <a:prstDash val="dash"/>
+          </a:ln>
+        </p:spPr>
+      </p:sp>
+      <p:sp>
+        <p:nvSpPr>
+          <p:cNvPr id="4" name="Text 2"/>
+          <p:cNvSpPr/>
+          <p:nvPr/>
+        </p:nvSpPr>
+        <p:spPr>
+          <a:xfrm>
+            <a:off x="777240" y="2029206"/>
+            <a:ext cx="4530395" cy="365760"/>
+          </a:xfrm>
+          <a:prstGeom prst="rect">
+            <a:avLst/>
+          </a:prstGeom>
+          <a:noFill/>
+          <a:ln/>
+        </p:spPr>
+        <p:txBody>
+          <a:bodyPr wrap="square" rtlCol="0" anchor="ctr"/>
+          <a:lstStyle/>
+          <a:p>
+            <a:pPr algn="ctr" indent="0" marL="0">
+              <a:buNone/>
+            </a:pPr>
+            <a:r>
+              <a:rPr lang="en-US" sz="1200" dirty="0">
+                <a:solidFill>
+                  <a:srgbClr val="777777"/>
+                </a:solidFill>
+                <a:latin typeface="Microsoft YaHei" pitchFamily="34" charset="0"/>
+                <a:ea typeface="Microsoft YaHei" pitchFamily="34" charset="-122"/>
+                <a:cs typeface="Microsoft YaHei" pitchFamily="34" charset="-120"/>
+              </a:rPr>
+              <a:t>素材缺失/路径未解析</a:t>
+            </a:r>
+            <a:endParaRPr lang="en-US" sz="1200" dirty="0"/>
+          </a:p>
+        </p:txBody>
+      </p:sp>
+      <p:sp>
+        <p:nvSpPr>
+          <p:cNvPr id="5" name="Text 3"/>
+          <p:cNvSpPr/>
+          <p:nvPr/>
+        </p:nvSpPr>
+        <p:spPr>
+          <a:xfrm>
+            <a:off x="640080" y="3574542"/>
+            <a:ext cx="4804715" cy="361188"/>
+          </a:xfrm>
+          <a:prstGeom prst="rect">
+            <a:avLst/>
+          </a:prstGeom>
+          <a:noFill/>
+          <a:ln/>
+        </p:spPr>
+        <p:txBody>
+          <a:bodyPr wrap="square" rtlCol="0" anchor="t"/>
+          <a:lstStyle/>
+          <a:p>
+            <a:pPr algn="l" indent="0" marL="0">
+              <a:buNone/>
+            </a:pPr>
+            <a:r>
+              <a:rPr lang="en-US" sz="1200" dirty="0">
+                <a:solidFill>
+                  <a:srgbClr val="777777"/>
+                </a:solidFill>
+                <a:latin typeface="Microsoft YaHei" pitchFamily="34" charset="0"/>
+                <a:ea typeface="Microsoft YaHei" pitchFamily="34" charset="-122"/>
+                <a:cs typeface="Microsoft YaHei" pitchFamily="34" charset="-120"/>
+              </a:rPr>
+              <a:t>1. 入口混乱</a:t>
+            </a:r>
+            <a:endParaRPr lang="en-US" sz="1200" dirty="0"/>
+          </a:p>
+        </p:txBody>
+      </p:sp>
+      <p:sp>
+        <p:nvSpPr>
+          <p:cNvPr id="6" name="Shape 4"/>
+          <p:cNvSpPr/>
+          <p:nvPr/>
+        </p:nvSpPr>
+        <p:spPr>
+          <a:xfrm>
+            <a:off x="5559095" y="887730"/>
+            <a:ext cx="2944825" cy="1257300"/>
+          </a:xfrm>
+          <a:prstGeom prst="rect">
+            <a:avLst/>
+          </a:prstGeom>
+          <a:solidFill>
+            <a:srgbClr val="FFFFFF"/>
+          </a:solidFill>
+          <a:ln w="19050">
+            <a:solidFill>
+              <a:srgbClr val="C47B2B"/>
+            </a:solidFill>
+            <a:prstDash val="dash"/>
+          </a:ln>
+        </p:spPr>
+      </p:sp>
+      <p:sp>
+        <p:nvSpPr>
+          <p:cNvPr id="7" name="Text 5"/>
+          <p:cNvSpPr/>
+          <p:nvPr/>
+        </p:nvSpPr>
+        <p:spPr>
+          <a:xfrm>
+            <a:off x="5696255" y="1333500"/>
+            <a:ext cx="2670505" cy="365760"/>
+          </a:xfrm>
+          <a:prstGeom prst="rect">
+            <a:avLst/>
+          </a:prstGeom>
+          <a:noFill/>
+          <a:ln/>
+        </p:spPr>
+        <p:txBody>
+          <a:bodyPr wrap="square" rtlCol="0" anchor="ctr"/>
+          <a:lstStyle/>
+          <a:p>
+            <a:pPr algn="ctr" indent="0" marL="0">
+              <a:buNone/>
+            </a:pPr>
+            <a:r>
+              <a:rPr lang="en-US" sz="1200" dirty="0">
+                <a:solidFill>
+                  <a:srgbClr val="777777"/>
+                </a:solidFill>
+                <a:latin typeface="Microsoft YaHei" pitchFamily="34" charset="0"/>
+                <a:ea typeface="Microsoft YaHei" pitchFamily="34" charset="-122"/>
+                <a:cs typeface="Microsoft YaHei" pitchFamily="34" charset="-120"/>
+              </a:rPr>
+              <a:t>素材缺失/路径未解析</a:t>
+            </a:r>
+            <a:endParaRPr lang="en-US" sz="1200" dirty="0"/>
+          </a:p>
+        </p:txBody>
+      </p:sp>
+      <p:sp>
+        <p:nvSpPr>
+          <p:cNvPr id="8" name="Text 6"/>
+          <p:cNvSpPr/>
+          <p:nvPr/>
+        </p:nvSpPr>
+        <p:spPr>
+          <a:xfrm>
+            <a:off x="5559095" y="2183130"/>
+            <a:ext cx="2944825" cy="171450"/>
+          </a:xfrm>
+          <a:prstGeom prst="rect">
+            <a:avLst/>
+          </a:prstGeom>
+          <a:noFill/>
+          <a:ln/>
+        </p:spPr>
+        <p:txBody>
+          <a:bodyPr wrap="square" rtlCol="0" anchor="t"/>
+          <a:lstStyle/>
+          <a:p>
+            <a:pPr algn="l" indent="0" marL="0">
+              <a:buNone/>
+            </a:pPr>
+            <a:r>
+              <a:rPr lang="en-US" sz="1200" dirty="0">
+                <a:solidFill>
+                  <a:srgbClr val="777777"/>
+                </a:solidFill>
+                <a:latin typeface="Microsoft YaHei" pitchFamily="34" charset="0"/>
+                <a:ea typeface="Microsoft YaHei" pitchFamily="34" charset="-122"/>
+                <a:cs typeface="Microsoft YaHei" pitchFamily="34" charset="-120"/>
+              </a:rPr>
+              <a:t>2. 路径不清</a:t>
+            </a:r>
+            <a:endParaRPr lang="en-US" sz="1200" dirty="0"/>
+          </a:p>
+        </p:txBody>
+      </p:sp>
+      <p:sp>
+        <p:nvSpPr>
+          <p:cNvPr id="9" name="Shape 7"/>
+          <p:cNvSpPr/>
+          <p:nvPr/>
+        </p:nvSpPr>
+        <p:spPr>
+          <a:xfrm>
+            <a:off x="5559095" y="2468880"/>
+            <a:ext cx="2944825" cy="1257300"/>
+          </a:xfrm>
+          <a:prstGeom prst="rect">
+            <a:avLst/>
+          </a:prstGeom>
+          <a:solidFill>
+            <a:srgbClr val="FFFFFF"/>
+          </a:solidFill>
+          <a:ln w="19050">
+            <a:solidFill>
+              <a:srgbClr val="C47B2B"/>
+            </a:solidFill>
+            <a:prstDash val="dash"/>
+          </a:ln>
+        </p:spPr>
+      </p:sp>
+      <p:sp>
+        <p:nvSpPr>
+          <p:cNvPr id="10" name="Text 8"/>
+          <p:cNvSpPr/>
+          <p:nvPr/>
+        </p:nvSpPr>
+        <p:spPr>
+          <a:xfrm>
+            <a:off x="5696255" y="2914650"/>
+            <a:ext cx="2670505" cy="365760"/>
+          </a:xfrm>
+          <a:prstGeom prst="rect">
+            <a:avLst/>
+          </a:prstGeom>
+          <a:noFill/>
+          <a:ln/>
+        </p:spPr>
+        <p:txBody>
+          <a:bodyPr wrap="square" rtlCol="0" anchor="ctr"/>
+          <a:lstStyle/>
+          <a:p>
+            <a:pPr algn="ctr" indent="0" marL="0">
+              <a:buNone/>
+            </a:pPr>
+            <a:r>
+              <a:rPr lang="en-US" sz="1200" dirty="0">
+                <a:solidFill>
+                  <a:srgbClr val="777777"/>
+                </a:solidFill>
+                <a:latin typeface="Microsoft YaHei" pitchFamily="34" charset="0"/>
+                <a:ea typeface="Microsoft YaHei" pitchFamily="34" charset="-122"/>
+                <a:cs typeface="Microsoft YaHei" pitchFamily="34" charset="-120"/>
+              </a:rPr>
+              <a:t>素材缺失/路径未解析</a:t>
+            </a:r>
+            <a:endParaRPr lang="en-US" sz="1200" dirty="0"/>
+          </a:p>
+        </p:txBody>
+      </p:sp>
+      <p:sp>
+        <p:nvSpPr>
+          <p:cNvPr id="11" name="Text 9"/>
+          <p:cNvSpPr/>
+          <p:nvPr/>
+        </p:nvSpPr>
+        <p:spPr>
+          <a:xfrm>
+            <a:off x="5559095" y="3764280"/>
+            <a:ext cx="2944825" cy="171450"/>
+          </a:xfrm>
+          <a:prstGeom prst="rect">
+            <a:avLst/>
+          </a:prstGeom>
+          <a:noFill/>
+          <a:ln/>
+        </p:spPr>
+        <p:txBody>
+          <a:bodyPr wrap="square" rtlCol="0" anchor="t"/>
+          <a:lstStyle/>
+          <a:p>
+            <a:pPr algn="l" indent="0" marL="0">
+              <a:buNone/>
+            </a:pPr>
+            <a:r>
+              <a:rPr lang="en-US" sz="1200" dirty="0">
+                <a:solidFill>
+                  <a:srgbClr val="777777"/>
+                </a:solidFill>
+                <a:latin typeface="Microsoft YaHei" pitchFamily="34" charset="0"/>
+                <a:ea typeface="Microsoft YaHei" pitchFamily="34" charset="-122"/>
+                <a:cs typeface="Microsoft YaHei" pitchFamily="34" charset="-120"/>
+              </a:rPr>
+              <a:t>3. 候诊过长</a:t>
+            </a:r>
+            <a:endParaRPr lang="en-US" sz="1200" dirty="0"/>
+          </a:p>
+        </p:txBody>
+      </p:sp>
+      <p:sp>
+        <p:nvSpPr>
+          <p:cNvPr id="12" name="Text 10"/>
+          <p:cNvSpPr/>
+          <p:nvPr/>
+        </p:nvSpPr>
+        <p:spPr>
+          <a:xfrm>
+            <a:off x="640080" y="4011930"/>
+            <a:ext cx="7863840" cy="400050"/>
           </a:xfrm>
           <a:prstGeom prst="rect">
             <a:avLst/>
@@ -981,419 +1290,7 @@
       </p:sp>
       <p:sp>
         <p:nvSpPr>
-          <p:cNvPr id="4" name="Shape 2"/>
-          <p:cNvSpPr/>
-          <p:nvPr/>
-        </p:nvSpPr>
-        <p:spPr>
-          <a:xfrm>
-            <a:off x="640080" y="1538478"/>
-            <a:ext cx="3874770" cy="1016653"/>
-          </a:xfrm>
-          <a:prstGeom prst="rect">
-            <a:avLst/>
-          </a:prstGeom>
-          <a:solidFill>
-            <a:srgbClr val="FFFFFF"/>
-          </a:solidFill>
-          <a:ln w="19050">
-            <a:solidFill>
-              <a:srgbClr val="C47B2B"/>
-            </a:solidFill>
-            <a:prstDash val="dash"/>
-          </a:ln>
-        </p:spPr>
-      </p:sp>
-      <p:sp>
-        <p:nvSpPr>
-          <p:cNvPr id="5" name="Text 3"/>
-          <p:cNvSpPr/>
-          <p:nvPr/>
-        </p:nvSpPr>
-        <p:spPr>
-          <a:xfrm>
-            <a:off x="777240" y="1863924"/>
-            <a:ext cx="3600450" cy="365760"/>
-          </a:xfrm>
-          <a:prstGeom prst="rect">
-            <a:avLst/>
-          </a:prstGeom>
-          <a:noFill/>
-          <a:ln/>
-        </p:spPr>
-        <p:txBody>
-          <a:bodyPr wrap="square" rtlCol="0" anchor="ctr"/>
-          <a:lstStyle/>
-          <a:p>
-            <a:pPr algn="ctr" indent="0" marL="0">
-              <a:buNone/>
-            </a:pPr>
-            <a:r>
-              <a:rPr lang="en-US" sz="1200" dirty="0">
-                <a:solidFill>
-                  <a:srgbClr val="777777"/>
-                </a:solidFill>
-                <a:latin typeface="Microsoft YaHei" pitchFamily="34" charset="0"/>
-                <a:ea typeface="Microsoft YaHei" pitchFamily="34" charset="-122"/>
-                <a:cs typeface="Microsoft YaHei" pitchFamily="34" charset="-120"/>
-              </a:rPr>
-              <a:t>素材缺失/路径未解析</a:t>
-            </a:r>
-            <a:endParaRPr lang="en-US" sz="1200" dirty="0"/>
-          </a:p>
-        </p:txBody>
-      </p:sp>
-      <p:sp>
-        <p:nvSpPr>
-          <p:cNvPr id="6" name="Text 4"/>
-          <p:cNvSpPr/>
-          <p:nvPr/>
-        </p:nvSpPr>
-        <p:spPr>
-          <a:xfrm>
-            <a:off x="640080" y="2593231"/>
-            <a:ext cx="3874770" cy="286748"/>
-          </a:xfrm>
-          <a:prstGeom prst="rect">
-            <a:avLst/>
-          </a:prstGeom>
-          <a:noFill/>
-          <a:ln/>
-        </p:spPr>
-        <p:txBody>
-          <a:bodyPr wrap="square" rtlCol="0" anchor="t"/>
-          <a:lstStyle/>
-          <a:p>
-            <a:pPr algn="l" indent="0" marL="0">
-              <a:buNone/>
-            </a:pPr>
-            <a:r>
-              <a:rPr lang="en-US" sz="1200" dirty="0">
-                <a:solidFill>
-                  <a:srgbClr val="777777"/>
-                </a:solidFill>
-                <a:latin typeface="Microsoft YaHei" pitchFamily="34" charset="0"/>
-                <a:ea typeface="Microsoft YaHei" pitchFamily="34" charset="-122"/>
-                <a:cs typeface="Microsoft YaHei" pitchFamily="34" charset="-120"/>
-              </a:rPr>
-              <a:t>1. 入口混乱</a:t>
-            </a:r>
-            <a:endParaRPr lang="en-US" sz="1200" dirty="0"/>
-          </a:p>
-        </p:txBody>
-      </p:sp>
-      <p:sp>
-        <p:nvSpPr>
-          <p:cNvPr id="7" name="Shape 5"/>
-          <p:cNvSpPr/>
-          <p:nvPr/>
-        </p:nvSpPr>
-        <p:spPr>
-          <a:xfrm>
-            <a:off x="4629150" y="1538478"/>
-            <a:ext cx="3874770" cy="1016653"/>
-          </a:xfrm>
-          <a:prstGeom prst="rect">
-            <a:avLst/>
-          </a:prstGeom>
-          <a:solidFill>
-            <a:srgbClr val="FFFFFF"/>
-          </a:solidFill>
-          <a:ln w="19050">
-            <a:solidFill>
-              <a:srgbClr val="C47B2B"/>
-            </a:solidFill>
-            <a:prstDash val="dash"/>
-          </a:ln>
-        </p:spPr>
-      </p:sp>
-      <p:sp>
-        <p:nvSpPr>
-          <p:cNvPr id="8" name="Text 6"/>
-          <p:cNvSpPr/>
-          <p:nvPr/>
-        </p:nvSpPr>
-        <p:spPr>
-          <a:xfrm>
-            <a:off x="4766310" y="1863924"/>
-            <a:ext cx="3600450" cy="365760"/>
-          </a:xfrm>
-          <a:prstGeom prst="rect">
-            <a:avLst/>
-          </a:prstGeom>
-          <a:noFill/>
-          <a:ln/>
-        </p:spPr>
-        <p:txBody>
-          <a:bodyPr wrap="square" rtlCol="0" anchor="ctr"/>
-          <a:lstStyle/>
-          <a:p>
-            <a:pPr algn="ctr" indent="0" marL="0">
-              <a:buNone/>
-            </a:pPr>
-            <a:r>
-              <a:rPr lang="en-US" sz="1200" dirty="0">
-                <a:solidFill>
-                  <a:srgbClr val="777777"/>
-                </a:solidFill>
-                <a:latin typeface="Microsoft YaHei" pitchFamily="34" charset="0"/>
-                <a:ea typeface="Microsoft YaHei" pitchFamily="34" charset="-122"/>
-                <a:cs typeface="Microsoft YaHei" pitchFamily="34" charset="-120"/>
-              </a:rPr>
-              <a:t>素材缺失/路径未解析</a:t>
-            </a:r>
-            <a:endParaRPr lang="en-US" sz="1200" dirty="0"/>
-          </a:p>
-        </p:txBody>
-      </p:sp>
-      <p:sp>
-        <p:nvSpPr>
-          <p:cNvPr id="9" name="Text 7"/>
-          <p:cNvSpPr/>
-          <p:nvPr/>
-        </p:nvSpPr>
-        <p:spPr>
-          <a:xfrm>
-            <a:off x="4629150" y="2593231"/>
-            <a:ext cx="3874770" cy="286748"/>
-          </a:xfrm>
-          <a:prstGeom prst="rect">
-            <a:avLst/>
-          </a:prstGeom>
-          <a:noFill/>
-          <a:ln/>
-        </p:spPr>
-        <p:txBody>
-          <a:bodyPr wrap="square" rtlCol="0" anchor="t"/>
-          <a:lstStyle/>
-          <a:p>
-            <a:pPr algn="l" indent="0" marL="0">
-              <a:buNone/>
-            </a:pPr>
-            <a:r>
-              <a:rPr lang="en-US" sz="1200" dirty="0">
-                <a:solidFill>
-                  <a:srgbClr val="777777"/>
-                </a:solidFill>
-                <a:latin typeface="Microsoft YaHei" pitchFamily="34" charset="0"/>
-                <a:ea typeface="Microsoft YaHei" pitchFamily="34" charset="-122"/>
-                <a:cs typeface="Microsoft YaHei" pitchFamily="34" charset="-120"/>
-              </a:rPr>
-              <a:t>2. 路径不清</a:t>
-            </a:r>
-            <a:endParaRPr lang="en-US" sz="1200" dirty="0"/>
-          </a:p>
-        </p:txBody>
-      </p:sp>
-      <p:sp>
-        <p:nvSpPr>
-          <p:cNvPr id="10" name="Shape 8"/>
-          <p:cNvSpPr/>
-          <p:nvPr/>
-        </p:nvSpPr>
-        <p:spPr>
-          <a:xfrm>
-            <a:off x="640080" y="2994279"/>
-            <a:ext cx="3874770" cy="1016653"/>
-          </a:xfrm>
-          <a:prstGeom prst="rect">
-            <a:avLst/>
-          </a:prstGeom>
-          <a:solidFill>
-            <a:srgbClr val="FFFFFF"/>
-          </a:solidFill>
-          <a:ln w="19050">
-            <a:solidFill>
-              <a:srgbClr val="C47B2B"/>
-            </a:solidFill>
-            <a:prstDash val="dash"/>
-          </a:ln>
-        </p:spPr>
-      </p:sp>
-      <p:sp>
-        <p:nvSpPr>
-          <p:cNvPr id="11" name="Text 9"/>
-          <p:cNvSpPr/>
-          <p:nvPr/>
-        </p:nvSpPr>
-        <p:spPr>
-          <a:xfrm>
-            <a:off x="777240" y="3319725"/>
-            <a:ext cx="3600450" cy="365760"/>
-          </a:xfrm>
-          <a:prstGeom prst="rect">
-            <a:avLst/>
-          </a:prstGeom>
-          <a:noFill/>
-          <a:ln/>
-        </p:spPr>
-        <p:txBody>
-          <a:bodyPr wrap="square" rtlCol="0" anchor="ctr"/>
-          <a:lstStyle/>
-          <a:p>
-            <a:pPr algn="ctr" indent="0" marL="0">
-              <a:buNone/>
-            </a:pPr>
-            <a:r>
-              <a:rPr lang="en-US" sz="1200" dirty="0">
-                <a:solidFill>
-                  <a:srgbClr val="777777"/>
-                </a:solidFill>
-                <a:latin typeface="Microsoft YaHei" pitchFamily="34" charset="0"/>
-                <a:ea typeface="Microsoft YaHei" pitchFamily="34" charset="-122"/>
-                <a:cs typeface="Microsoft YaHei" pitchFamily="34" charset="-120"/>
-              </a:rPr>
-              <a:t>素材缺失/路径未解析</a:t>
-            </a:r>
-            <a:endParaRPr lang="en-US" sz="1200" dirty="0"/>
-          </a:p>
-        </p:txBody>
-      </p:sp>
-      <p:sp>
-        <p:nvSpPr>
-          <p:cNvPr id="12" name="Text 10"/>
-          <p:cNvSpPr/>
-          <p:nvPr/>
-        </p:nvSpPr>
-        <p:spPr>
-          <a:xfrm>
-            <a:off x="640080" y="4049032"/>
-            <a:ext cx="3874770" cy="286748"/>
-          </a:xfrm>
-          <a:prstGeom prst="rect">
-            <a:avLst/>
-          </a:prstGeom>
-          <a:noFill/>
-          <a:ln/>
-        </p:spPr>
-        <p:txBody>
-          <a:bodyPr wrap="square" rtlCol="0" anchor="t"/>
-          <a:lstStyle/>
-          <a:p>
-            <a:pPr algn="l" indent="0" marL="0">
-              <a:buNone/>
-            </a:pPr>
-            <a:r>
-              <a:rPr lang="en-US" sz="1200" dirty="0">
-                <a:solidFill>
-                  <a:srgbClr val="777777"/>
-                </a:solidFill>
-                <a:latin typeface="Microsoft YaHei" pitchFamily="34" charset="0"/>
-                <a:ea typeface="Microsoft YaHei" pitchFamily="34" charset="-122"/>
-                <a:cs typeface="Microsoft YaHei" pitchFamily="34" charset="-120"/>
-              </a:rPr>
-              <a:t>3. 候诊过长</a:t>
-            </a:r>
-            <a:endParaRPr lang="en-US" sz="1200" dirty="0"/>
-          </a:p>
-        </p:txBody>
-      </p:sp>
-      <p:sp>
-        <p:nvSpPr>
-          <p:cNvPr id="13" name="Shape 11"/>
-          <p:cNvSpPr/>
-          <p:nvPr/>
-        </p:nvSpPr>
-        <p:spPr>
-          <a:xfrm>
-            <a:off x="4629150" y="2994279"/>
-            <a:ext cx="3874770" cy="1016653"/>
-          </a:xfrm>
-          <a:prstGeom prst="rect">
-            <a:avLst/>
-          </a:prstGeom>
-          <a:solidFill>
-            <a:srgbClr val="FFFFFF"/>
-          </a:solidFill>
-          <a:ln w="19050">
-            <a:solidFill>
-              <a:srgbClr val="C47B2B"/>
-            </a:solidFill>
-            <a:prstDash val="dash"/>
-          </a:ln>
-        </p:spPr>
-      </p:sp>
-      <p:sp>
-        <p:nvSpPr>
-          <p:cNvPr id="14" name="Text 12"/>
-          <p:cNvSpPr/>
-          <p:nvPr/>
-        </p:nvSpPr>
-        <p:spPr>
-          <a:xfrm>
-            <a:off x="4766310" y="3319725"/>
-            <a:ext cx="3600450" cy="365760"/>
-          </a:xfrm>
-          <a:prstGeom prst="rect">
-            <a:avLst/>
-          </a:prstGeom>
-          <a:noFill/>
-          <a:ln/>
-        </p:spPr>
-        <p:txBody>
-          <a:bodyPr wrap="square" rtlCol="0" anchor="ctr"/>
-          <a:lstStyle/>
-          <a:p>
-            <a:pPr algn="ctr" indent="0" marL="0">
-              <a:buNone/>
-            </a:pPr>
-            <a:r>
-              <a:rPr lang="en-US" sz="1200" dirty="0">
-                <a:solidFill>
-                  <a:srgbClr val="777777"/>
-                </a:solidFill>
-                <a:latin typeface="Microsoft YaHei" pitchFamily="34" charset="0"/>
-                <a:ea typeface="Microsoft YaHei" pitchFamily="34" charset="-122"/>
-                <a:cs typeface="Microsoft YaHei" pitchFamily="34" charset="-120"/>
-              </a:rPr>
-              <a:t>素材缺失/路径未解析</a:t>
-            </a:r>
-            <a:endParaRPr lang="en-US" sz="1200" dirty="0"/>
-          </a:p>
-        </p:txBody>
-      </p:sp>
-      <p:sp>
-        <p:nvSpPr>
-          <p:cNvPr id="15" name="Text 13"/>
-          <p:cNvSpPr/>
-          <p:nvPr/>
-        </p:nvSpPr>
-        <p:spPr>
-          <a:xfrm>
-            <a:off x="4629150" y="4049032"/>
-            <a:ext cx="3874770" cy="286748"/>
-          </a:xfrm>
-          <a:prstGeom prst="rect">
-            <a:avLst/>
-          </a:prstGeom>
-          <a:noFill/>
-          <a:ln/>
-        </p:spPr>
-        <p:txBody>
-          <a:bodyPr wrap="square" rtlCol="0" anchor="t"/>
-          <a:lstStyle/>
-          <a:p>
-            <a:pPr algn="l" indent="0" marL="0">
-              <a:buNone/>
-            </a:pPr>
-            <a:r>
-              <a:rPr lang="en-US" sz="1200" dirty="0">
-                <a:solidFill>
-                  <a:srgbClr val="777777"/>
-                </a:solidFill>
-                <a:latin typeface="Microsoft YaHei" pitchFamily="34" charset="0"/>
-                <a:ea typeface="Microsoft YaHei" pitchFamily="34" charset="-122"/>
-                <a:cs typeface="Microsoft YaHei" pitchFamily="34" charset="-120"/>
-              </a:rPr>
-              <a:t>4. 问询反复</a:t>
-            </a:r>
-            <a:endParaRPr lang="en-US" sz="1200" dirty="0"/>
-          </a:p>
-        </p:txBody>
-      </p:sp>
-      <p:sp>
-        <p:nvSpPr>
-          <p:cNvPr id="16" name="Text 14"/>
+          <p:cNvPr id="13" name="Text 11"/>
           <p:cNvSpPr/>
           <p:nvPr/>
         </p:nvSpPr>

--- a/tests/golden/visual/composition/v2_evidence_board/deck.pptx
+++ b/tests/golden/visual/composition/v2_evidence_board/deck.pptx
@@ -910,7 +910,7 @@
         <p:spPr>
           <a:xfrm>
             <a:off x="640080" y="411480"/>
-            <a:ext cx="7863840" cy="400050"/>
+            <a:ext cx="7863840" cy="601218"/>
           </a:xfrm>
           <a:prstGeom prst="rect">
             <a:avLst/>
@@ -948,8 +948,8 @@
         </p:nvSpPr>
         <p:spPr>
           <a:xfrm>
-            <a:off x="640080" y="887730"/>
-            <a:ext cx="4804715" cy="2648712"/>
+            <a:off x="640080" y="1088898"/>
+            <a:ext cx="4804715" cy="2303160"/>
           </a:xfrm>
           <a:prstGeom prst="rect">
             <a:avLst/>
@@ -973,7 +973,7 @@
         </p:nvSpPr>
         <p:spPr>
           <a:xfrm>
-            <a:off x="777240" y="2029206"/>
+            <a:off x="777240" y="2057598"/>
             <a:ext cx="4530395" cy="365760"/>
           </a:xfrm>
           <a:prstGeom prst="rect">
@@ -1012,8 +1012,8 @@
         </p:nvSpPr>
         <p:spPr>
           <a:xfrm>
-            <a:off x="640080" y="3574542"/>
-            <a:ext cx="4804715" cy="361188"/>
+            <a:off x="640080" y="3430158"/>
+            <a:ext cx="4804715" cy="505572"/>
           </a:xfrm>
           <a:prstGeom prst="rect">
             <a:avLst/>
@@ -1051,8 +1051,8 @@
         </p:nvSpPr>
         <p:spPr>
           <a:xfrm>
-            <a:off x="5559095" y="887730"/>
-            <a:ext cx="2944825" cy="1257300"/>
+            <a:off x="5559095" y="1088898"/>
+            <a:ext cx="2944825" cy="1089096"/>
           </a:xfrm>
           <a:prstGeom prst="rect">
             <a:avLst/>
@@ -1076,7 +1076,7 @@
         </p:nvSpPr>
         <p:spPr>
           <a:xfrm>
-            <a:off x="5696255" y="1333500"/>
+            <a:off x="5696255" y="1450566"/>
             <a:ext cx="2670505" cy="365760"/>
           </a:xfrm>
           <a:prstGeom prst="rect">
@@ -1115,8 +1115,8 @@
         </p:nvSpPr>
         <p:spPr>
           <a:xfrm>
-            <a:off x="5559095" y="2183130"/>
-            <a:ext cx="2944825" cy="171450"/>
+            <a:off x="5559095" y="2216094"/>
+            <a:ext cx="2944825" cy="239070"/>
           </a:xfrm>
           <a:prstGeom prst="rect">
             <a:avLst/>
@@ -1154,8 +1154,8 @@
         </p:nvSpPr>
         <p:spPr>
           <a:xfrm>
-            <a:off x="5559095" y="2468880"/>
-            <a:ext cx="2944825" cy="1257300"/>
+            <a:off x="5559095" y="2569464"/>
+            <a:ext cx="2944825" cy="1089096"/>
           </a:xfrm>
           <a:prstGeom prst="rect">
             <a:avLst/>
@@ -1179,7 +1179,7 @@
         </p:nvSpPr>
         <p:spPr>
           <a:xfrm>
-            <a:off x="5696255" y="2914650"/>
+            <a:off x="5696255" y="2931132"/>
             <a:ext cx="2670505" cy="365760"/>
           </a:xfrm>
           <a:prstGeom prst="rect">
@@ -1218,8 +1218,8 @@
         </p:nvSpPr>
         <p:spPr>
           <a:xfrm>
-            <a:off x="5559095" y="3764280"/>
-            <a:ext cx="2944825" cy="171450"/>
+            <a:off x="5559095" y="3696660"/>
+            <a:ext cx="2944825" cy="239070"/>
           </a:xfrm>
           <a:prstGeom prst="rect">
             <a:avLst/>

--- a/tests/golden/visual/composition/v2_evidence_board/deck.pptx
+++ b/tests/golden/visual/composition/v2_evidence_board/deck.pptx
@@ -580,7 +580,7 @@
     <p:bg>
       <p:bgPr>
         <a:solidFill>
-          <a:srgbClr val="F7F6F3"/>
+          <a:srgbClr val="D9E2EA"/>
         </a:solidFill>
       </p:bgPr>
     </p:bg>
@@ -909,8 +909,8 @@
         </p:nvSpPr>
         <p:spPr>
           <a:xfrm>
-            <a:off x="640080" y="411480"/>
-            <a:ext cx="7863840" cy="601218"/>
+            <a:off x="502920" y="347472"/>
+            <a:ext cx="8138160" cy="594360"/>
           </a:xfrm>
           <a:prstGeom prst="rect">
             <a:avLst/>
@@ -926,9 +926,9 @@
               <a:buNone/>
             </a:pPr>
             <a:r>
-              <a:rPr lang="en-US" sz="3400" b="1" dirty="0">
+              <a:rPr lang="en-US" sz="2000" b="1" dirty="0">
                 <a:solidFill>
-                  <a:srgbClr val="1A1A1A"/>
+                  <a:srgbClr val="1B3A4B"/>
                 </a:solidFill>
                 <a:latin typeface="Microsoft YaHei" pitchFamily="34" charset="0"/>
                 <a:ea typeface="Microsoft YaHei" pitchFamily="34" charset="-122"/>
@@ -936,7 +936,7 @@
               </a:rPr>
               <a:t>患者就医过程中的高压力节点</a:t>
             </a:r>
-            <a:endParaRPr lang="en-US" sz="3400" dirty="0"/>
+            <a:endParaRPr lang="en-US" sz="2000" dirty="0"/>
           </a:p>
         </p:txBody>
       </p:sp>
@@ -948,14 +948,14 @@
         </p:nvSpPr>
         <p:spPr>
           <a:xfrm>
-            <a:off x="640080" y="1088898"/>
-            <a:ext cx="4804715" cy="2303160"/>
-          </a:xfrm>
-          <a:prstGeom prst="rect">
-            <a:avLst/>
-          </a:prstGeom>
-          <a:solidFill>
-            <a:srgbClr val="FFFFFF"/>
+            <a:off x="502920" y="1018032"/>
+            <a:ext cx="4974793" cy="2403260"/>
+          </a:xfrm>
+          <a:prstGeom prst="rect">
+            <a:avLst/>
+          </a:prstGeom>
+          <a:solidFill>
+            <a:srgbClr val="F3F7FA"/>
           </a:solidFill>
           <a:ln w="19050">
             <a:solidFill>
@@ -973,8 +973,8 @@
         </p:nvSpPr>
         <p:spPr>
           <a:xfrm>
-            <a:off x="777240" y="2057598"/>
-            <a:ext cx="4530395" cy="365760"/>
+            <a:off x="640080" y="2036782"/>
+            <a:ext cx="4700473" cy="365760"/>
           </a:xfrm>
           <a:prstGeom prst="rect">
             <a:avLst/>
@@ -992,7 +992,7 @@
             <a:r>
               <a:rPr lang="en-US" sz="1200" dirty="0">
                 <a:solidFill>
-                  <a:srgbClr val="777777"/>
+                  <a:srgbClr val="6A7D8C"/>
                 </a:solidFill>
                 <a:latin typeface="Microsoft YaHei" pitchFamily="34" charset="0"/>
                 <a:ea typeface="Microsoft YaHei" pitchFamily="34" charset="-122"/>
@@ -1012,8 +1012,8 @@
         </p:nvSpPr>
         <p:spPr>
           <a:xfrm>
-            <a:off x="640080" y="3430158"/>
-            <a:ext cx="4804715" cy="505572"/>
+            <a:off x="502920" y="3459392"/>
+            <a:ext cx="4974793" cy="527545"/>
           </a:xfrm>
           <a:prstGeom prst="rect">
             <a:avLst/>
@@ -1029,9 +1029,9 @@
               <a:buNone/>
             </a:pPr>
             <a:r>
-              <a:rPr lang="en-US" sz="1200" dirty="0">
+              <a:rPr lang="en-US" sz="1100" dirty="0">
                 <a:solidFill>
-                  <a:srgbClr val="777777"/>
+                  <a:srgbClr val="3A4F5F"/>
                 </a:solidFill>
                 <a:latin typeface="Microsoft YaHei" pitchFamily="34" charset="0"/>
                 <a:ea typeface="Microsoft YaHei" pitchFamily="34" charset="-122"/>
@@ -1039,7 +1039,7 @@
               </a:rPr>
               <a:t>1. 入口混乱</a:t>
             </a:r>
-            <a:endParaRPr lang="en-US" sz="1200" dirty="0"/>
+            <a:endParaRPr lang="en-US" sz="1100" dirty="0"/>
           </a:p>
         </p:txBody>
       </p:sp>
@@ -1051,14 +1051,14 @@
         </p:nvSpPr>
         <p:spPr>
           <a:xfrm>
-            <a:off x="5559095" y="1088898"/>
-            <a:ext cx="2944825" cy="1089096"/>
-          </a:xfrm>
-          <a:prstGeom prst="rect">
-            <a:avLst/>
-          </a:prstGeom>
-          <a:solidFill>
-            <a:srgbClr val="FFFFFF"/>
+            <a:off x="5592013" y="1018032"/>
+            <a:ext cx="3049067" cy="1139146"/>
+          </a:xfrm>
+          <a:prstGeom prst="rect">
+            <a:avLst/>
+          </a:prstGeom>
+          <a:solidFill>
+            <a:srgbClr val="F3F7FA"/>
           </a:solidFill>
           <a:ln w="19050">
             <a:solidFill>
@@ -1076,8 +1076,8 @@
         </p:nvSpPr>
         <p:spPr>
           <a:xfrm>
-            <a:off x="5696255" y="1450566"/>
-            <a:ext cx="2670505" cy="365760"/>
+            <a:off x="5729173" y="1404725"/>
+            <a:ext cx="2774747" cy="365760"/>
           </a:xfrm>
           <a:prstGeom prst="rect">
             <a:avLst/>
@@ -1095,7 +1095,7 @@
             <a:r>
               <a:rPr lang="en-US" sz="1200" dirty="0">
                 <a:solidFill>
-                  <a:srgbClr val="777777"/>
+                  <a:srgbClr val="6A7D8C"/>
                 </a:solidFill>
                 <a:latin typeface="Microsoft YaHei" pitchFamily="34" charset="0"/>
                 <a:ea typeface="Microsoft YaHei" pitchFamily="34" charset="-122"/>
@@ -1115,8 +1115,8 @@
         </p:nvSpPr>
         <p:spPr>
           <a:xfrm>
-            <a:off x="5559095" y="2216094"/>
-            <a:ext cx="2944825" cy="239070"/>
+            <a:off x="5592013" y="2195278"/>
+            <a:ext cx="3049067" cy="250056"/>
           </a:xfrm>
           <a:prstGeom prst="rect">
             <a:avLst/>
@@ -1132,9 +1132,9 @@
               <a:buNone/>
             </a:pPr>
             <a:r>
-              <a:rPr lang="en-US" sz="1200" dirty="0">
+              <a:rPr lang="en-US" sz="1100" dirty="0">
                 <a:solidFill>
-                  <a:srgbClr val="777777"/>
+                  <a:srgbClr val="3A4F5F"/>
                 </a:solidFill>
                 <a:latin typeface="Microsoft YaHei" pitchFamily="34" charset="0"/>
                 <a:ea typeface="Microsoft YaHei" pitchFamily="34" charset="-122"/>
@@ -1142,7 +1142,7 @@
               </a:rPr>
               <a:t>2. 路径不清</a:t>
             </a:r>
-            <a:endParaRPr lang="en-US" sz="1200" dirty="0"/>
+            <a:endParaRPr lang="en-US" sz="1100" dirty="0"/>
           </a:p>
         </p:txBody>
       </p:sp>
@@ -1154,14 +1154,14 @@
         </p:nvSpPr>
         <p:spPr>
           <a:xfrm>
-            <a:off x="5559095" y="2569464"/>
-            <a:ext cx="2944825" cy="1089096"/>
-          </a:xfrm>
-          <a:prstGeom prst="rect">
-            <a:avLst/>
-          </a:prstGeom>
-          <a:solidFill>
-            <a:srgbClr val="FFFFFF"/>
+            <a:off x="5592013" y="2559634"/>
+            <a:ext cx="3049067" cy="1139146"/>
+          </a:xfrm>
+          <a:prstGeom prst="rect">
+            <a:avLst/>
+          </a:prstGeom>
+          <a:solidFill>
+            <a:srgbClr val="F3F7FA"/>
           </a:solidFill>
           <a:ln w="19050">
             <a:solidFill>
@@ -1179,8 +1179,8 @@
         </p:nvSpPr>
         <p:spPr>
           <a:xfrm>
-            <a:off x="5696255" y="2931132"/>
-            <a:ext cx="2670505" cy="365760"/>
+            <a:off x="5729173" y="2946327"/>
+            <a:ext cx="2774747" cy="365760"/>
           </a:xfrm>
           <a:prstGeom prst="rect">
             <a:avLst/>
@@ -1198,7 +1198,7 @@
             <a:r>
               <a:rPr lang="en-US" sz="1200" dirty="0">
                 <a:solidFill>
-                  <a:srgbClr val="777777"/>
+                  <a:srgbClr val="6A7D8C"/>
                 </a:solidFill>
                 <a:latin typeface="Microsoft YaHei" pitchFamily="34" charset="0"/>
                 <a:ea typeface="Microsoft YaHei" pitchFamily="34" charset="-122"/>
@@ -1218,8 +1218,8 @@
         </p:nvSpPr>
         <p:spPr>
           <a:xfrm>
-            <a:off x="5559095" y="3696660"/>
-            <a:ext cx="2944825" cy="239070"/>
+            <a:off x="5592013" y="3736880"/>
+            <a:ext cx="3049067" cy="250056"/>
           </a:xfrm>
           <a:prstGeom prst="rect">
             <a:avLst/>
@@ -1235,9 +1235,9 @@
               <a:buNone/>
             </a:pPr>
             <a:r>
-              <a:rPr lang="en-US" sz="1200" dirty="0">
+              <a:rPr lang="en-US" sz="1100" dirty="0">
                 <a:solidFill>
-                  <a:srgbClr val="777777"/>
+                  <a:srgbClr val="3A4F5F"/>
                 </a:solidFill>
                 <a:latin typeface="Microsoft YaHei" pitchFamily="34" charset="0"/>
                 <a:ea typeface="Microsoft YaHei" pitchFamily="34" charset="-122"/>
@@ -1245,7 +1245,7 @@
               </a:rPr>
               <a:t>3. 候诊过长</a:t>
             </a:r>
-            <a:endParaRPr lang="en-US" sz="1200" dirty="0"/>
+            <a:endParaRPr lang="en-US" sz="1100" dirty="0"/>
           </a:p>
         </p:txBody>
       </p:sp>
@@ -1257,8 +1257,8 @@
         </p:nvSpPr>
         <p:spPr>
           <a:xfrm>
-            <a:off x="640080" y="4011930"/>
-            <a:ext cx="7863840" cy="400050"/>
+            <a:off x="502920" y="4063136"/>
+            <a:ext cx="8138160" cy="412852"/>
           </a:xfrm>
           <a:prstGeom prst="rect">
             <a:avLst/>
@@ -1274,9 +1274,9 @@
               <a:buNone/>
             </a:pPr>
             <a:r>
-              <a:rPr lang="en-US" sz="1800" dirty="0">
+              <a:rPr lang="en-US" sz="1400" b="1" dirty="0">
                 <a:solidFill>
-                  <a:srgbClr val="4A4A4A"/>
+                  <a:srgbClr val="1B3A4B"/>
                 </a:solidFill>
                 <a:latin typeface="Microsoft YaHei" pitchFamily="34" charset="0"/>
                 <a:ea typeface="Microsoft YaHei" pitchFamily="34" charset="-122"/>
@@ -1284,7 +1284,7 @@
               </a:rPr>
               <a:t>患者的焦虑并不只来自疾病，而来自入口混乱、路径不清和长时间候诊。</a:t>
             </a:r>
-            <a:endParaRPr lang="en-US" sz="1800" dirty="0"/>
+            <a:endParaRPr lang="en-US" sz="1400" dirty="0"/>
           </a:p>
         </p:txBody>
       </p:sp>
@@ -1296,8 +1296,8 @@
         </p:nvSpPr>
         <p:spPr>
           <a:xfrm>
-            <a:off x="640080" y="4530852"/>
-            <a:ext cx="5504688" cy="201168"/>
+            <a:off x="502920" y="4594860"/>
+            <a:ext cx="5696712" cy="201168"/>
           </a:xfrm>
           <a:prstGeom prst="rect">
             <a:avLst/>
@@ -1315,7 +1315,7 @@
             <a:r>
               <a:rPr lang="en-US" sz="800" dirty="0">
                 <a:solidFill>
-                  <a:srgbClr val="777777"/>
+                  <a:srgbClr val="6A7D8C"/>
                 </a:solidFill>
                 <a:latin typeface="Microsoft YaHei" pitchFamily="34" charset="0"/>
                 <a:ea typeface="Microsoft YaHei" pitchFamily="34" charset="-122"/>
